--- a/代码/figures/论文数据图/问题二/第二问_技术路线图_参考风格.pptx
+++ b/代码/figures/论文数据图/问题二/第二问_技术路线图_参考风格.pptx
@@ -2539,98 +2539,98 @@
             <a:noAutofit/>
           </a:bodyPr>
           <a:lstStyle xmlns:a="http://schemas.openxmlformats.org/drawingml/2006/main"/>
-          <a:p xmlns:a="http://schemas.openxmlformats.org/drawingml/2006/main">
-            <a:pPr algn="ctr">
-              <a:defRPr sz="1725" b="0">
-                <a:solidFill>
-                  <a:srgbClr val="111111"/>
-                </a:solidFill>
-                <a:latin typeface="SimSun"/>
-                <a:ea typeface="SimSun"/>
-                <a:cs typeface="SimSun"/>
-              </a:defRPr>
-            </a:pPr>
-            <a:r>
-              <a:rPr sz="1725" b="0">
-                <a:solidFill>
-                  <a:srgbClr val="111111"/>
-                </a:solidFill>
-                <a:latin typeface="SimSun"/>
-                <a:ea typeface="SimSun"/>
-                <a:cs typeface="SimSun"/>
-              </a:rPr>
-              <a:t>Bellman 动态规划</a:t>
-            </a:r>
-          </a:p>
-          <a:p xmlns:a="http://schemas.openxmlformats.org/drawingml/2006/main">
-            <a:pPr algn="ctr">
-              <a:defRPr sz="1725" b="0">
-                <a:solidFill>
-                  <a:srgbClr val="111111"/>
-                </a:solidFill>
-                <a:latin typeface="SimSun"/>
-                <a:ea typeface="SimSun"/>
-                <a:cs typeface="SimSun"/>
-              </a:defRPr>
-            </a:pPr>
-            <a:r>
-              <a:rPr sz="1725" b="0">
-                <a:solidFill>
-                  <a:srgbClr val="111111"/>
-                </a:solidFill>
-                <a:latin typeface="SimSun"/>
-                <a:ea typeface="SimSun"/>
-                <a:cs typeface="SimSun"/>
-              </a:rPr>
-              <a:t>计算固定计划下库存价值</a:t>
-            </a:r>
-          </a:p>
-          <a:p xmlns:a="http://schemas.openxmlformats.org/drawingml/2006/main">
-            <a:pPr algn="ctr">
-              <a:defRPr sz="1725" b="0">
-                <a:solidFill>
-                  <a:srgbClr val="111111"/>
-                </a:solidFill>
-                <a:latin typeface="SimSun"/>
-                <a:ea typeface="SimSun"/>
-                <a:cs typeface="SimSun"/>
-              </a:defRPr>
-            </a:pPr>
-            <a:r>
-              <a:rPr sz="1725" b="0">
-                <a:solidFill>
-                  <a:srgbClr val="111111"/>
-                </a:solidFill>
-                <a:latin typeface="SimSun"/>
-                <a:ea typeface="SimSun"/>
-                <a:cs typeface="SimSun"/>
-              </a:rPr>
-              <a:t>最小化预期紧急购电费</a:t>
-            </a:r>
-          </a:p>
-          <a:p xmlns:a="http://schemas.openxmlformats.org/drawingml/2006/main">
-            <a:pPr algn="ctr">
-              <a:defRPr sz="1725" b="0">
-                <a:solidFill>
-                  <a:srgbClr val="111111"/>
-                </a:solidFill>
-                <a:latin typeface="SimSun"/>
-                <a:ea typeface="SimSun"/>
-                <a:cs typeface="SimSun"/>
-              </a:defRPr>
-            </a:pPr>
-            <a:r>
-              <a:rPr sz="1725" b="0">
-                <a:solidFill>
-                  <a:srgbClr val="111111"/>
-                </a:solidFill>
-                <a:latin typeface="SimSun"/>
-                <a:ea typeface="SimSun"/>
-                <a:cs typeface="SimSun"/>
-              </a:rPr>
-              <a:t>终端系数 κ = 0</a:t>
-            </a:r>
-          </a:p>
+          <ns0:p xmlns:ns0="http://schemas.openxmlformats.org/drawingml/2006/main">
+            <ns0:pPr algn="ctr">
+              <ns0:defRPr sz="1725" b="0">
+                <ns0:solidFill>
+                  <ns0:srgbClr val="111111"/>
+                </ns0:solidFill>
+                <ns0:latin typeface="SimSun"/>
+                <ns0:ea typeface="SimSun"/>
+                <ns0:cs typeface="SimSun"/>
+              </ns0:defRPr>
+            </ns0:pPr>
+            <ns0:r>
+              <ns0:rPr sz="1725" b="0">
+                <ns0:solidFill>
+                  <ns0:srgbClr val="111111"/>
+                </ns0:solidFill>
+                <ns0:latin typeface="SimSun"/>
+                <ns0:ea typeface="SimSun"/>
+                <ns0:cs typeface="SimSun"/>
+              </ns0:rPr>
+              <ns0:t>Bellman 动态规划</ns0:t>
+            </ns0:r>
+          </ns0:p>
+          <ns1:p xmlns:ns1="http://schemas.openxmlformats.org/drawingml/2006/main">
+            <ns1:pPr algn="ctr">
+              <ns1:defRPr sz="1725" b="0">
+                <ns1:solidFill>
+                  <ns1:srgbClr val="111111"/>
+                </ns1:solidFill>
+                <ns1:latin typeface="SimSun"/>
+                <ns1:ea typeface="SimSun"/>
+                <ns1:cs typeface="SimSun"/>
+              </ns1:defRPr>
+            </ns1:pPr>
+            <ns1:r>
+              <ns1:rPr sz="1725" b="0">
+                <ns1:solidFill>
+                  <ns1:srgbClr val="111111"/>
+                </ns1:solidFill>
+                <ns1:latin typeface="SimSun"/>
+                <ns1:ea typeface="SimSun"/>
+                <ns1:cs typeface="SimSun"/>
+              </ns1:rPr>
+              <ns1:t>计算固定计划下库存价值</ns1:t>
+            </ns1:r>
+          </ns1:p>
+          <ns2:p xmlns:ns2="http://schemas.openxmlformats.org/drawingml/2006/main">
+            <ns2:pPr algn="ctr">
+              <ns2:defRPr sz="1725" b="0">
+                <ns2:solidFill>
+                  <ns2:srgbClr val="111111"/>
+                </ns2:solidFill>
+                <ns2:latin typeface="SimSun"/>
+                <ns2:ea typeface="SimSun"/>
+                <ns2:cs typeface="SimSun"/>
+              </ns2:defRPr>
+            </ns2:pPr>
+            <ns2:r>
+              <ns2:rPr sz="1725" b="0">
+                <ns2:solidFill>
+                  <ns2:srgbClr val="111111"/>
+                </ns2:solidFill>
+                <ns2:latin typeface="SimSun"/>
+                <ns2:ea typeface="SimSun"/>
+                <ns2:cs typeface="SimSun"/>
+              </ns2:rPr>
+              <ns2:t>最小化预期紧急购电费</ns2:t>
+            </ns2:r>
+          </ns2:p>
+          <ns3:p xmlns:ns3="http://schemas.openxmlformats.org/drawingml/2006/main">
+            <ns3:pPr algn="ctr">
+              <ns3:defRPr sz="1725" b="0">
+                <ns3:solidFill>
+                  <ns3:srgbClr val="111111"/>
+                </ns3:solidFill>
+                <ns3:latin typeface="SimSun"/>
+                <ns3:ea typeface="SimSun"/>
+                <ns3:cs typeface="SimSun"/>
+              </ns3:defRPr>
+            </ns3:pPr>
+            <ns3:r>
+              <ns3:rPr sz="1725" b="0">
+                <ns3:solidFill>
+                  <ns3:srgbClr val="111111"/>
+                </ns3:solidFill>
+                <ns3:latin typeface="SimSun"/>
+                <ns3:ea typeface="SimSun"/>
+                <ns3:cs typeface="SimSun"/>
+              </ns3:rPr>
+              <ns3:t>终端价值设为零</ns3:t>
+            </ns3:r>
+          </ns3:p>
         </p:txBody>
       </p:sp>
       <p:cxnSp>
